--- a/Community_Library_Management_System_Presentation.pptx
+++ b/Community_Library_Management_System_Presentation.pptx
@@ -3369,384 +3369,102 @@
         <p:nvPr/>
       </p:nvGrpSpPr>
       <p:grpSpPr/>
-      <p:sp>
-        <p:nvSpPr>
-          <p:cNvPr id="2" name="TextBox 1"/>
-          <p:cNvSpPr txBox="1"/>
+      <p:pic>
+        <p:nvPicPr>
+          <p:cNvPr id="2" name="Picture 1" descr="Screenshot 2026-09-30 223216(3).png"/>
+          <p:cNvPicPr>
+            <a:picLocks noChangeAspect="1"/>
+          </p:cNvPicPr>
           <p:nvPr/>
-        </p:nvSpPr>
-        <p:spPr>
-          <a:xfrm>
-            <a:off x="594360" y="320040"/>
-            <a:ext cx="10972800" cy="594360"/>
+        </p:nvPicPr>
+        <p:blipFill>
+          <a:blip r:embed="rId3"/>
+          <a:stretch>
+            <a:fillRect/>
+          </a:stretch>
+        </p:blipFill>
+        <p:spPr>
+          <a:xfrm>
+            <a:off x="274320" y="1381790"/>
+            <a:ext cx="5739231" cy="857442"/>
           </a:xfrm>
           <a:prstGeom prst="rect">
             <a:avLst/>
           </a:prstGeom>
-          <a:noFill/>
-        </p:spPr>
-        <p:txBody>
-          <a:bodyPr wrap="none">
-            <a:spAutoFit/>
-          </a:bodyPr>
-          <a:lstStyle/>
-          <a:p>
-            <a:pPr>
-              <a:defRPr sz="2800" b="1">
-                <a:solidFill>
-                  <a:srgbClr val="182A44"/>
-                </a:solidFill>
-                <a:latin typeface="Aptos Display"/>
-              </a:defRPr>
-            </a:pPr>
-            <a:r>
-              <a:t>9. Output Screenshots</a:t>
-            </a:r>
-          </a:p>
-        </p:txBody>
-      </p:sp>
-      <p:sp>
-        <p:nvSpPr>
-          <p:cNvPr id="3" name="TextBox 2"/>
-          <p:cNvSpPr txBox="1"/>
+        </p:spPr>
+      </p:pic>
+      <p:pic>
+        <p:nvPicPr>
+          <p:cNvPr id="3" name="Picture 2" descr="Screenshot 2026-09-30 223234(2).png"/>
+          <p:cNvPicPr>
+            <a:picLocks noChangeAspect="1"/>
+          </p:cNvPicPr>
           <p:nvPr/>
-        </p:nvSpPr>
-        <p:spPr>
-          <a:xfrm>
-            <a:off x="640080" y="1051560"/>
-            <a:ext cx="10789920" cy="548640"/>
+        </p:nvPicPr>
+        <p:blipFill>
+          <a:blip r:embed="rId4"/>
+          <a:stretch>
+            <a:fillRect/>
+          </a:stretch>
+        </p:blipFill>
+        <p:spPr>
+          <a:xfrm>
+            <a:off x="6178143" y="1375674"/>
+            <a:ext cx="5739231" cy="869675"/>
           </a:xfrm>
           <a:prstGeom prst="rect">
             <a:avLst/>
           </a:prstGeom>
-          <a:noFill/>
-        </p:spPr>
-        <p:txBody>
-          <a:bodyPr wrap="none">
-            <a:spAutoFit/>
-          </a:bodyPr>
-          <a:lstStyle/>
-          <a:p>
-            <a:pPr>
-              <a:defRPr sz="2000">
-                <a:solidFill>
-                  <a:srgbClr val="2C5F91"/>
-                </a:solidFill>
-              </a:defRPr>
-            </a:pPr>
-            <a:r>
-              <a:t>Add screenshots showing the actual program output here.</a:t>
-            </a:r>
-          </a:p>
-        </p:txBody>
-      </p:sp>
-      <p:sp>
-        <p:nvSpPr>
-          <p:cNvPr id="4" name="Rounded Rectangle 3"/>
-          <p:cNvSpPr/>
+        </p:spPr>
+      </p:pic>
+      <p:pic>
+        <p:nvPicPr>
+          <p:cNvPr id="4" name="Picture 3" descr="Screenshot 2026-09-30 223253(3).png"/>
+          <p:cNvPicPr>
+            <a:picLocks noChangeAspect="1"/>
+          </p:cNvPicPr>
           <p:nvPr/>
-        </p:nvSpPr>
-        <p:spPr>
-          <a:xfrm>
-            <a:off x="731520" y="1828800"/>
-            <a:ext cx="4983480" cy="1508760"/>
-          </a:xfrm>
-          <a:prstGeom prst="roundRect">
-            <a:avLst/>
-          </a:prstGeom>
-          <a:solidFill>
-            <a:srgbClr val="F5F8FA"/>
-          </a:solidFill>
-          <a:ln>
-            <a:solidFill>
-              <a:srgbClr val="D7E1EB"/>
-            </a:solidFill>
-          </a:ln>
-        </p:spPr>
-        <p:style>
-          <a:lnRef idx="1">
-            <a:schemeClr val="accent1"/>
-          </a:lnRef>
-          <a:fillRef idx="3">
-            <a:schemeClr val="accent1"/>
-          </a:fillRef>
-          <a:effectRef idx="2">
-            <a:schemeClr val="accent1"/>
-          </a:effectRef>
-          <a:fontRef idx="minor">
-            <a:schemeClr val="lt1"/>
-          </a:fontRef>
-        </p:style>
-        <p:txBody>
-          <a:bodyPr rtlCol="0" anchor="ctr"/>
-          <a:lstStyle/>
-          <a:p>
-            <a:pPr>
-              <a:defRPr sz="1700" b="1">
-                <a:solidFill>
-                  <a:srgbClr val="2C5F91"/>
-                </a:solidFill>
-              </a:defRPr>
-            </a:pPr>
-            <a:r>
-              <a:t>Main Menu</a:t>
-            </a:r>
-          </a:p>
-          <a:p>
-            <a:pPr>
-              <a:defRPr sz="1300">
-                <a:solidFill>
-                  <a:srgbClr val="646E78"/>
-                </a:solidFill>
-              </a:defRPr>
-            </a:pPr>
-          </a:p>
-          <a:p>
-            <a:r>
-              <a:t>[Insert screenshot]</a:t>
-            </a:r>
-          </a:p>
-        </p:txBody>
-      </p:sp>
-      <p:sp>
-        <p:nvSpPr>
-          <p:cNvPr id="5" name="Rounded Rectangle 4"/>
-          <p:cNvSpPr/>
+        </p:nvPicPr>
+        <p:blipFill>
+          <a:blip r:embed="rId5"/>
+          <a:stretch>
+            <a:fillRect/>
+          </a:stretch>
+        </p:blipFill>
+        <p:spPr>
+          <a:xfrm>
+            <a:off x="274320" y="4648495"/>
+            <a:ext cx="5739231" cy="797984"/>
+          </a:xfrm>
+          <a:prstGeom prst="rect">
+            <a:avLst/>
+          </a:prstGeom>
+        </p:spPr>
+      </p:pic>
+      <p:pic>
+        <p:nvPicPr>
+          <p:cNvPr id="5" name="Picture 4" descr="Screenshot 2026-09-30 223309(3).png"/>
+          <p:cNvPicPr>
+            <a:picLocks noChangeAspect="1"/>
+          </p:cNvPicPr>
           <p:nvPr/>
-        </p:nvSpPr>
-        <p:spPr>
-          <a:xfrm>
-            <a:off x="6217920" y="1828800"/>
-            <a:ext cx="4983480" cy="1508760"/>
-          </a:xfrm>
-          <a:prstGeom prst="roundRect">
-            <a:avLst/>
-          </a:prstGeom>
-          <a:solidFill>
-            <a:srgbClr val="F5F8FA"/>
-          </a:solidFill>
-          <a:ln>
-            <a:solidFill>
-              <a:srgbClr val="D7E1EB"/>
-            </a:solidFill>
-          </a:ln>
-        </p:spPr>
-        <p:style>
-          <a:lnRef idx="1">
-            <a:schemeClr val="accent1"/>
-          </a:lnRef>
-          <a:fillRef idx="3">
-            <a:schemeClr val="accent1"/>
-          </a:fillRef>
-          <a:effectRef idx="2">
-            <a:schemeClr val="accent1"/>
-          </a:effectRef>
-          <a:fontRef idx="minor">
-            <a:schemeClr val="lt1"/>
-          </a:fontRef>
-        </p:style>
-        <p:txBody>
-          <a:bodyPr rtlCol="0" anchor="ctr"/>
-          <a:lstStyle/>
-          <a:p>
-            <a:pPr>
-              <a:defRPr sz="1700" b="1">
-                <a:solidFill>
-                  <a:srgbClr val="2C5F91"/>
-                </a:solidFill>
-              </a:defRPr>
-            </a:pPr>
-            <a:r>
-              <a:t>Add / Display Book</a:t>
-            </a:r>
-          </a:p>
-          <a:p>
-            <a:pPr>
-              <a:defRPr sz="1300">
-                <a:solidFill>
-                  <a:srgbClr val="646E78"/>
-                </a:solidFill>
-              </a:defRPr>
-            </a:pPr>
-          </a:p>
-          <a:p>
-            <a:r>
-              <a:t>[Insert screenshot]</a:t>
-            </a:r>
-          </a:p>
-        </p:txBody>
-      </p:sp>
-      <p:sp>
-        <p:nvSpPr>
-          <p:cNvPr id="6" name="Rounded Rectangle 5"/>
-          <p:cNvSpPr/>
-          <p:nvPr/>
-        </p:nvSpPr>
-        <p:spPr>
-          <a:xfrm>
-            <a:off x="731520" y="3749039"/>
-            <a:ext cx="4983480" cy="1508760"/>
-          </a:xfrm>
-          <a:prstGeom prst="roundRect">
-            <a:avLst/>
-          </a:prstGeom>
-          <a:solidFill>
-            <a:srgbClr val="F5F8FA"/>
-          </a:solidFill>
-          <a:ln>
-            <a:solidFill>
-              <a:srgbClr val="D7E1EB"/>
-            </a:solidFill>
-          </a:ln>
-        </p:spPr>
-        <p:style>
-          <a:lnRef idx="1">
-            <a:schemeClr val="accent1"/>
-          </a:lnRef>
-          <a:fillRef idx="3">
-            <a:schemeClr val="accent1"/>
-          </a:fillRef>
-          <a:effectRef idx="2">
-            <a:schemeClr val="accent1"/>
-          </a:effectRef>
-          <a:fontRef idx="minor">
-            <a:schemeClr val="lt1"/>
-          </a:fontRef>
-        </p:style>
-        <p:txBody>
-          <a:bodyPr rtlCol="0" anchor="ctr"/>
-          <a:lstStyle/>
-          <a:p>
-            <a:pPr>
-              <a:defRPr sz="1700" b="1">
-                <a:solidFill>
-                  <a:srgbClr val="2C5F91"/>
-                </a:solidFill>
-              </a:defRPr>
-            </a:pPr>
-            <a:r>
-              <a:t>Issue / Return</a:t>
-            </a:r>
-          </a:p>
-          <a:p>
-            <a:pPr>
-              <a:defRPr sz="1300">
-                <a:solidFill>
-                  <a:srgbClr val="646E78"/>
-                </a:solidFill>
-              </a:defRPr>
-            </a:pPr>
-          </a:p>
-          <a:p>
-            <a:r>
-              <a:t>[Insert screenshot]</a:t>
-            </a:r>
-          </a:p>
-        </p:txBody>
-      </p:sp>
-      <p:sp>
-        <p:nvSpPr>
-          <p:cNvPr id="7" name="Rounded Rectangle 6"/>
-          <p:cNvSpPr/>
-          <p:nvPr/>
-        </p:nvSpPr>
-        <p:spPr>
-          <a:xfrm>
-            <a:off x="6217920" y="3749039"/>
-            <a:ext cx="4983480" cy="1508760"/>
-          </a:xfrm>
-          <a:prstGeom prst="roundRect">
-            <a:avLst/>
-          </a:prstGeom>
-          <a:solidFill>
-            <a:srgbClr val="F5F8FA"/>
-          </a:solidFill>
-          <a:ln>
-            <a:solidFill>
-              <a:srgbClr val="D7E1EB"/>
-            </a:solidFill>
-          </a:ln>
-        </p:spPr>
-        <p:style>
-          <a:lnRef idx="1">
-            <a:schemeClr val="accent1"/>
-          </a:lnRef>
-          <a:fillRef idx="3">
-            <a:schemeClr val="accent1"/>
-          </a:fillRef>
-          <a:effectRef idx="2">
-            <a:schemeClr val="accent1"/>
-          </a:effectRef>
-          <a:fontRef idx="minor">
-            <a:schemeClr val="lt1"/>
-          </a:fontRef>
-        </p:style>
-        <p:txBody>
-          <a:bodyPr rtlCol="0" anchor="ctr"/>
-          <a:lstStyle/>
-          <a:p>
-            <a:pPr>
-              <a:defRPr sz="1700" b="1">
-                <a:solidFill>
-                  <a:srgbClr val="2C5F91"/>
-                </a:solidFill>
-              </a:defRPr>
-            </a:pPr>
-            <a:r>
-              <a:t>Search / Fine Result</a:t>
-            </a:r>
-          </a:p>
-          <a:p>
-            <a:pPr>
-              <a:defRPr sz="1300">
-                <a:solidFill>
-                  <a:srgbClr val="646E78"/>
-                </a:solidFill>
-              </a:defRPr>
-            </a:pPr>
-          </a:p>
-          <a:p>
-            <a:r>
-              <a:t>[Insert screenshot]</a:t>
-            </a:r>
-          </a:p>
-        </p:txBody>
-      </p:sp>
-      <p:sp>
-        <p:nvSpPr>
-          <p:cNvPr id="8" name="TextBox 7"/>
-          <p:cNvSpPr txBox="1"/>
-          <p:nvPr/>
-        </p:nvSpPr>
-        <p:spPr>
-          <a:xfrm>
-            <a:off x="594360" y="6446520"/>
-            <a:ext cx="10972800" cy="228600"/>
+        </p:nvPicPr>
+        <p:blipFill>
+          <a:blip r:embed="rId6"/>
+          <a:stretch>
+            <a:fillRect/>
+          </a:stretch>
+        </p:blipFill>
+        <p:spPr>
+          <a:xfrm>
+            <a:off x="6178143" y="4615943"/>
+            <a:ext cx="5739231" cy="863089"/>
           </a:xfrm>
           <a:prstGeom prst="rect">
             <a:avLst/>
           </a:prstGeom>
-          <a:noFill/>
-        </p:spPr>
-        <p:txBody>
-          <a:bodyPr wrap="none">
-            <a:spAutoFit/>
-          </a:bodyPr>
-          <a:lstStyle/>
-          <a:p>
-            <a:pPr>
-              <a:defRPr sz="900">
-                <a:solidFill>
-                  <a:srgbClr val="646E78"/>
-                </a:solidFill>
-              </a:defRPr>
-            </a:pPr>
-            <a:r>
-              <a:t>Community Library Management System  •  Batch 10                                      9</a:t>
-            </a:r>
-          </a:p>
-        </p:txBody>
-      </p:sp>
+        </p:spPr>
+      </p:pic>
     </p:spTree>
   </p:cSld>
   <p:clrMapOvr>
